--- a/MaestrAI_Thesis_Proposal.pptx
+++ b/MaestrAI_Thesis_Proposal.pptx
@@ -5,19 +5,17 @@
     <p:sldMasterId id="2147483648" r:id="rId1"/>
   </p:sldMasterIdLst>
   <p:notesMasterIdLst>
-    <p:notesMasterId r:id="rId12"/>
+    <p:notesMasterId r:id="rId10"/>
   </p:notesMasterIdLst>
   <p:sldIdLst>
     <p:sldId id="256" r:id="rId2"/>
     <p:sldId id="257" r:id="rId3"/>
     <p:sldId id="258" r:id="rId4"/>
-    <p:sldId id="259" r:id="rId5"/>
-    <p:sldId id="260" r:id="rId6"/>
-    <p:sldId id="261" r:id="rId7"/>
-    <p:sldId id="265" r:id="rId8"/>
-    <p:sldId id="266" r:id="rId9"/>
-    <p:sldId id="263" r:id="rId10"/>
-    <p:sldId id="264" r:id="rId11"/>
+    <p:sldId id="260" r:id="rId5"/>
+    <p:sldId id="265" r:id="rId6"/>
+    <p:sldId id="266" r:id="rId7"/>
+    <p:sldId id="263" r:id="rId8"/>
+    <p:sldId id="264" r:id="rId9"/>
   </p:sldIdLst>
   <p:sldSz cx="12192000" cy="6858000"/>
   <p:notesSz cx="6858000" cy="12192000"/>
@@ -553,7 +551,7 @@
           <a:p>
             <a:r>
               <a:rPr lang="en-US" dirty="0"/>
-              <a:t>State the general aim clearly: a head-to-head comparison of MaestrAI versus the existing GradeChum tool. Tell the panel the specific objectives and measurement criteria are still being finalized — the bracketed items are placeholders to fill in once the methodology is set.</a:t>
+              <a:t>Emphasise the two beneficiaries you named: instructors get reduced workload and checking time; students get more timely and consistent feedback, which is the core motivation for the system.</a:t>
             </a:r>
           </a:p>
         </p:txBody>
@@ -640,7 +638,7 @@
           <a:p>
             <a:r>
               <a:rPr lang="en-US" dirty="0"/>
-              <a:t>Emphasise the two beneficiaries you named: instructors get reduced workload and checking time; students get more timely and consistent feedback, which is the core motivation for the system.</a:t>
+              <a:t>Frame these as goals, not guarantees — this is a proposal. The headline deliverable is concrete evidence on which system grades programming assessments better.</a:t>
             </a:r>
           </a:p>
         </p:txBody>
@@ -662,7 +660,7 @@
           <a:p>
             <a:fld id="{F7021451-1387-4CA6-816F-3879F97B5CBC}" type="slidenum">
               <a:rPr lang="en-US"/>
-              <a:t>5</a:t>
+              <a:t>7</a:t>
             </a:fld>
             <a:endParaRPr lang="en-US"/>
           </a:p>
@@ -727,7 +725,7 @@
           <a:p>
             <a:r>
               <a:rPr lang="en-US" dirty="0"/>
-              <a:t>Position the work honestly: GradeChum is a real, existing AI grading tool (general purpose). MaestrAI is your proposed, programming-specific, vision-based system. The point of the study is to measure which grades programming work better — that result does not exist yet.</a:t>
+              <a:t>Thank the panel and open the floor. Have the problem statement and the comparison rationale ready for likely questions about scope and methodology.</a:t>
             </a:r>
           </a:p>
         </p:txBody>
@@ -749,181 +747,7 @@
           <a:p>
             <a:fld id="{F7021451-1387-4CA6-816F-3879F97B5CBC}" type="slidenum">
               <a:rPr lang="en-US"/>
-              <a:t>6</a:t>
-            </a:fld>
-            <a:endParaRPr lang="en-US"/>
-          </a:p>
-        </p:txBody>
-      </p:sp>
-    </p:spTree>
-    <p:extLst>
-      <p:ext uri="{BB962C8B-B14F-4D97-AF65-F5344CB8AC3E}">
-        <p14:creationId xmlns:p14="http://schemas.microsoft.com/office/powerpoint/2010/main" val="1024086991"/>
-      </p:ext>
-    </p:extLst>
-  </p:cSld>
-  <p:clrMapOvr>
-    <a:masterClrMapping/>
-  </p:clrMapOvr>
-</p:notes>
-</file>
-
-<file path=ppt/notesSlides/notesSlide7.xml><?xml version="1.0" encoding="utf-8"?>
-<p:notes xmlns:a="http://schemas.openxmlformats.org/drawingml/2006/main" xmlns:r="http://schemas.openxmlformats.org/officeDocument/2006/relationships" xmlns:p="http://schemas.openxmlformats.org/presentationml/2006/main">
-  <p:cSld>
-    <p:spTree>
-      <p:nvGrpSpPr>
-        <p:cNvPr id="1" name=""/>
-        <p:cNvGrpSpPr/>
-        <p:nvPr/>
-      </p:nvGrpSpPr>
-      <p:grpSpPr>
-        <a:xfrm>
-          <a:off x="0" y="0"/>
-          <a:ext cx="0" cy="0"/>
-          <a:chOff x="0" y="0"/>
-          <a:chExt cx="0" cy="0"/>
-        </a:xfrm>
-      </p:grpSpPr>
-      <p:sp>
-        <p:nvSpPr>
-          <p:cNvPr id="2" name="Slide Image Placeholder 1"/>
-          <p:cNvSpPr>
-            <a:spLocks noGrp="1" noRot="1" noChangeAspect="1"/>
-          </p:cNvSpPr>
-          <p:nvPr>
-            <p:ph type="sldImg"/>
-          </p:nvPr>
-        </p:nvSpPr>
-        <p:spPr/>
-      </p:sp>
-      <p:sp>
-        <p:nvSpPr>
-          <p:cNvPr id="3" name="Notes Placeholder 2"/>
-          <p:cNvSpPr>
-            <a:spLocks noGrp="1"/>
-          </p:cNvSpPr>
-          <p:nvPr>
-            <p:ph type="body" idx="1"/>
-          </p:nvPr>
-        </p:nvSpPr>
-        <p:spPr/>
-        <p:txBody>
-          <a:bodyPr/>
-          <a:lstStyle/>
-          <a:p>
-            <a:r>
-              <a:rPr lang="en-US" dirty="0"/>
-              <a:t>Frame these as goals, not guarantees — this is a proposal. The headline deliverable is concrete evidence on which system grades programming assessments better.</a:t>
-            </a:r>
-          </a:p>
-        </p:txBody>
-      </p:sp>
-      <p:sp>
-        <p:nvSpPr>
-          <p:cNvPr id="4" name="Slide Number Placeholder 3"/>
-          <p:cNvSpPr>
-            <a:spLocks noGrp="1"/>
-          </p:cNvSpPr>
-          <p:nvPr>
-            <p:ph type="sldNum" sz="quarter" idx="10"/>
-          </p:nvPr>
-        </p:nvSpPr>
-        <p:spPr/>
-        <p:txBody>
-          <a:bodyPr/>
-          <a:lstStyle/>
-          <a:p>
-            <a:fld id="{F7021451-1387-4CA6-816F-3879F97B5CBC}" type="slidenum">
-              <a:rPr lang="en-US"/>
-              <a:t>9</a:t>
-            </a:fld>
-            <a:endParaRPr lang="en-US"/>
-          </a:p>
-        </p:txBody>
-      </p:sp>
-    </p:spTree>
-    <p:extLst>
-      <p:ext uri="{BB962C8B-B14F-4D97-AF65-F5344CB8AC3E}">
-        <p14:creationId xmlns:p14="http://schemas.microsoft.com/office/powerpoint/2010/main" val="1024086991"/>
-      </p:ext>
-    </p:extLst>
-  </p:cSld>
-  <p:clrMapOvr>
-    <a:masterClrMapping/>
-  </p:clrMapOvr>
-</p:notes>
-</file>
-
-<file path=ppt/notesSlides/notesSlide8.xml><?xml version="1.0" encoding="utf-8"?>
-<p:notes xmlns:a="http://schemas.openxmlformats.org/drawingml/2006/main" xmlns:r="http://schemas.openxmlformats.org/officeDocument/2006/relationships" xmlns:p="http://schemas.openxmlformats.org/presentationml/2006/main">
-  <p:cSld>
-    <p:spTree>
-      <p:nvGrpSpPr>
-        <p:cNvPr id="1" name=""/>
-        <p:cNvGrpSpPr/>
-        <p:nvPr/>
-      </p:nvGrpSpPr>
-      <p:grpSpPr>
-        <a:xfrm>
-          <a:off x="0" y="0"/>
-          <a:ext cx="0" cy="0"/>
-          <a:chOff x="0" y="0"/>
-          <a:chExt cx="0" cy="0"/>
-        </a:xfrm>
-      </p:grpSpPr>
-      <p:sp>
-        <p:nvSpPr>
-          <p:cNvPr id="2" name="Slide Image Placeholder 1"/>
-          <p:cNvSpPr>
-            <a:spLocks noGrp="1" noRot="1" noChangeAspect="1"/>
-          </p:cNvSpPr>
-          <p:nvPr>
-            <p:ph type="sldImg"/>
-          </p:nvPr>
-        </p:nvSpPr>
-        <p:spPr/>
-      </p:sp>
-      <p:sp>
-        <p:nvSpPr>
-          <p:cNvPr id="3" name="Notes Placeholder 2"/>
-          <p:cNvSpPr>
-            <a:spLocks noGrp="1"/>
-          </p:cNvSpPr>
-          <p:nvPr>
-            <p:ph type="body" idx="1"/>
-          </p:nvPr>
-        </p:nvSpPr>
-        <p:spPr/>
-        <p:txBody>
-          <a:bodyPr/>
-          <a:lstStyle/>
-          <a:p>
-            <a:r>
-              <a:rPr lang="en-US" dirty="0"/>
-              <a:t>Thank the panel and open the floor. Have the problem statement and the comparison rationale ready for likely questions about scope and methodology.</a:t>
-            </a:r>
-          </a:p>
-        </p:txBody>
-      </p:sp>
-      <p:sp>
-        <p:nvSpPr>
-          <p:cNvPr id="4" name="Slide Number Placeholder 3"/>
-          <p:cNvSpPr>
-            <a:spLocks noGrp="1"/>
-          </p:cNvSpPr>
-          <p:nvPr>
-            <p:ph type="sldNum" sz="quarter" idx="10"/>
-          </p:nvPr>
-        </p:nvSpPr>
-        <p:spPr/>
-        <p:txBody>
-          <a:bodyPr/>
-          <a:lstStyle/>
-          <a:p>
-            <a:fld id="{F7021451-1387-4CA6-816F-3879F97B5CBC}" type="slidenum">
-              <a:rPr lang="en-US"/>
-              <a:t>10</a:t>
+              <a:t>8</a:t>
             </a:fld>
             <a:endParaRPr lang="en-US"/>
           </a:p>
@@ -1643,274 +1467,6 @@
 </p:sld>
 </file>
 
-<file path=ppt/slides/slide10.xml><?xml version="1.0" encoding="utf-8"?>
-<p:sld xmlns:a="http://schemas.openxmlformats.org/drawingml/2006/main" xmlns:r="http://schemas.openxmlformats.org/officeDocument/2006/relationships" xmlns:p="http://schemas.openxmlformats.org/presentationml/2006/main">
-  <p:cSld name="Slide 9">
-    <p:bg>
-      <p:bgPr>
-        <a:solidFill>
-          <a:srgbClr val="0D3B45"/>
-        </a:solidFill>
-        <a:effectLst/>
-      </p:bgPr>
-    </p:bg>
-    <p:spTree>
-      <p:nvGrpSpPr>
-        <p:cNvPr id="1" name=""/>
-        <p:cNvGrpSpPr/>
-        <p:nvPr/>
-      </p:nvGrpSpPr>
-      <p:grpSpPr>
-        <a:xfrm>
-          <a:off x="0" y="0"/>
-          <a:ext cx="0" cy="0"/>
-          <a:chOff x="0" y="0"/>
-          <a:chExt cx="0" cy="0"/>
-        </a:xfrm>
-      </p:grpSpPr>
-      <p:sp>
-        <p:nvSpPr>
-          <p:cNvPr id="2" name="Shape 0"/>
-          <p:cNvSpPr/>
-          <p:nvPr/>
-        </p:nvSpPr>
-        <p:spPr>
-          <a:xfrm>
-            <a:off x="-1554480" y="3657600"/>
-            <a:ext cx="4937760" cy="4937760"/>
-          </a:xfrm>
-          <a:prstGeom prst="ellipse">
-            <a:avLst/>
-          </a:prstGeom>
-          <a:solidFill>
-            <a:srgbClr val="0E7C86">
-              <a:alpha val="20000"/>
-            </a:srgbClr>
-          </a:solidFill>
-          <a:ln/>
-        </p:spPr>
-      </p:sp>
-      <p:sp>
-        <p:nvSpPr>
-          <p:cNvPr id="3" name="Shape 1"/>
-          <p:cNvSpPr/>
-          <p:nvPr/>
-        </p:nvSpPr>
-        <p:spPr>
-          <a:xfrm>
-            <a:off x="9692640" y="-1645920"/>
-            <a:ext cx="4572000" cy="4572000"/>
-          </a:xfrm>
-          <a:prstGeom prst="ellipse">
-            <a:avLst/>
-          </a:prstGeom>
-          <a:solidFill>
-            <a:srgbClr val="E8943A">
-              <a:alpha val="16000"/>
-            </a:srgbClr>
-          </a:solidFill>
-          <a:ln/>
-        </p:spPr>
-      </p:sp>
-      <p:sp>
-        <p:nvSpPr>
-          <p:cNvPr id="4" name="Shape 2"/>
-          <p:cNvSpPr/>
-          <p:nvPr/>
-        </p:nvSpPr>
-        <p:spPr>
-          <a:xfrm>
-            <a:off x="5394960" y="1051560"/>
-            <a:ext cx="1371600" cy="1371600"/>
-          </a:xfrm>
-          <a:prstGeom prst="ellipse">
-            <a:avLst/>
-          </a:prstGeom>
-          <a:solidFill>
-            <a:srgbClr val="E8943A"/>
-          </a:solidFill>
-          <a:ln/>
-          <a:effectLst>
-            <a:outerShdw blurRad="114300" dist="38100" dir="5400000" algn="bl" rotWithShape="0">
-              <a:srgbClr val="0A2E36">
-                <a:alpha val="16000"/>
-              </a:srgbClr>
-            </a:outerShdw>
-          </a:effectLst>
-        </p:spPr>
-      </p:sp>
-      <p:pic>
-        <p:nvPicPr>
-          <p:cNvPr id="5" name="Image 0" descr="preencoded.png"/>
-          <p:cNvPicPr>
-            <a:picLocks noChangeAspect="1"/>
-          </p:cNvPicPr>
-          <p:nvPr/>
-        </p:nvPicPr>
-        <p:blipFill>
-          <a:blip r:embed="rId3"/>
-          <a:stretch>
-            <a:fillRect/>
-          </a:stretch>
-        </p:blipFill>
-        <p:spPr>
-          <a:xfrm>
-            <a:off x="5733288" y="1389888"/>
-            <a:ext cx="694944" cy="694944"/>
-          </a:xfrm>
-          <a:prstGeom prst="rect">
-            <a:avLst/>
-          </a:prstGeom>
-        </p:spPr>
-      </p:pic>
-      <p:sp>
-        <p:nvSpPr>
-          <p:cNvPr id="6" name="Text 3"/>
-          <p:cNvSpPr/>
-          <p:nvPr/>
-        </p:nvSpPr>
-        <p:spPr>
-          <a:xfrm>
-            <a:off x="914400" y="2606040"/>
-            <a:ext cx="10332720" cy="914400"/>
-          </a:xfrm>
-          <a:prstGeom prst="rect">
-            <a:avLst/>
-          </a:prstGeom>
-          <a:noFill/>
-          <a:ln/>
-        </p:spPr>
-        <p:txBody>
-          <a:bodyPr wrap="square" lIns="0" tIns="0" rIns="0" bIns="0" rtlCol="0" anchor="ctr"/>
-          <a:lstStyle/>
-          <a:p>
-            <a:pPr marL="0" indent="0" algn="ctr">
-              <a:buNone/>
-            </a:pPr>
-            <a:r>
-              <a:rPr lang="en-US" sz="5600" b="1" dirty="0">
-                <a:solidFill>
-                  <a:srgbClr val="FFFFFF"/>
-                </a:solidFill>
-                <a:latin typeface="Cambria" pitchFamily="34" charset="0"/>
-                <a:ea typeface="Cambria" pitchFamily="34" charset="-122"/>
-                <a:cs typeface="Cambria" pitchFamily="34" charset="-120"/>
-              </a:rPr>
-              <a:t>Thank you</a:t>
-            </a:r>
-            <a:endParaRPr lang="en-US" sz="5600" dirty="0"/>
-          </a:p>
-        </p:txBody>
-      </p:sp>
-      <p:sp>
-        <p:nvSpPr>
-          <p:cNvPr id="7" name="Text 4"/>
-          <p:cNvSpPr/>
-          <p:nvPr/>
-        </p:nvSpPr>
-        <p:spPr>
-          <a:xfrm>
-            <a:off x="914400" y="3611880"/>
-            <a:ext cx="10332720" cy="548640"/>
-          </a:xfrm>
-          <a:prstGeom prst="rect">
-            <a:avLst/>
-          </a:prstGeom>
-          <a:noFill/>
-          <a:ln/>
-        </p:spPr>
-        <p:txBody>
-          <a:bodyPr wrap="square" lIns="0" tIns="0" rIns="0" bIns="0" rtlCol="0" anchor="ctr"/>
-          <a:lstStyle/>
-          <a:p>
-            <a:pPr marL="0" indent="0" algn="ctr">
-              <a:buNone/>
-            </a:pPr>
-            <a:r>
-              <a:rPr lang="en-US" sz="2200" dirty="0">
-                <a:solidFill>
-                  <a:srgbClr val="F6C57A"/>
-                </a:solidFill>
-                <a:latin typeface="Calibri" pitchFamily="34" charset="0"/>
-                <a:ea typeface="Calibri" pitchFamily="34" charset="-122"/>
-                <a:cs typeface="Calibri" pitchFamily="34" charset="-120"/>
-              </a:rPr>
-              <a:t>Questions &amp; Discussion</a:t>
-            </a:r>
-            <a:endParaRPr lang="en-US" sz="2200" dirty="0"/>
-          </a:p>
-        </p:txBody>
-      </p:sp>
-      <p:sp>
-        <p:nvSpPr>
-          <p:cNvPr id="8" name="Text 5"/>
-          <p:cNvSpPr/>
-          <p:nvPr/>
-        </p:nvSpPr>
-        <p:spPr>
-          <a:xfrm>
-            <a:off x="914400" y="4846320"/>
-            <a:ext cx="10332720" cy="914400"/>
-          </a:xfrm>
-          <a:prstGeom prst="rect">
-            <a:avLst/>
-          </a:prstGeom>
-          <a:noFill/>
-          <a:ln/>
-        </p:spPr>
-        <p:txBody>
-          <a:bodyPr wrap="square" lIns="0" tIns="0" rIns="0" bIns="0" rtlCol="0" anchor="t"/>
-          <a:lstStyle/>
-          <a:p>
-            <a:pPr marL="0" indent="0" algn="ctr">
-              <a:lnSpc>
-                <a:spcPts val="2600"/>
-              </a:lnSpc>
-              <a:buNone/>
-            </a:pPr>
-            <a:r>
-              <a:rPr lang="en-US" sz="1500" dirty="0">
-                <a:solidFill>
-                  <a:srgbClr val="EAF3F4"/>
-                </a:solidFill>
-                <a:latin typeface="Calibri" pitchFamily="34" charset="0"/>
-                <a:ea typeface="Calibri" pitchFamily="34" charset="-122"/>
-                <a:cs typeface="Calibri" pitchFamily="34" charset="-120"/>
-              </a:rPr>
-              <a:t>Jayrald B. Tajanlangit   •   Francis Marc Nikko Diwa   •   John Cale N. Nombrado</a:t>
-            </a:r>
-            <a:endParaRPr lang="en-US" sz="1500" dirty="0"/>
-          </a:p>
-          <a:p>
-            <a:pPr marL="0" indent="0" algn="ctr">
-              <a:lnSpc>
-                <a:spcPts val="2600"/>
-              </a:lnSpc>
-              <a:buNone/>
-            </a:pPr>
-            <a:r>
-              <a:rPr lang="en-US" sz="1400" dirty="0">
-                <a:solidFill>
-                  <a:srgbClr val="5A6B6E"/>
-                </a:solidFill>
-                <a:latin typeface="Calibri" pitchFamily="34" charset="0"/>
-                <a:ea typeface="Calibri" pitchFamily="34" charset="-122"/>
-                <a:cs typeface="Calibri" pitchFamily="34" charset="-120"/>
-              </a:rPr>
-              <a:t>Adviser:  Engr. Violdan Bayocot</a:t>
-            </a:r>
-            <a:endParaRPr lang="en-US" sz="1500" dirty="0"/>
-          </a:p>
-        </p:txBody>
-      </p:sp>
-    </p:spTree>
-  </p:cSld>
-  <p:clrMapOvr>
-    <a:masterClrMapping/>
-  </p:clrMapOvr>
-</p:sld>
-</file>
-
 <file path=ppt/slides/slide2.xml><?xml version="1.0" encoding="utf-8"?>
 <p:sld xmlns:a="http://schemas.openxmlformats.org/drawingml/2006/main" xmlns:r="http://schemas.openxmlformats.org/officeDocument/2006/relationships" xmlns:p="http://schemas.openxmlformats.org/presentationml/2006/main">
   <p:cSld name="Slide 2">
@@ -3449,522 +3005,6 @@
 
 <file path=ppt/slides/slide4.xml><?xml version="1.0" encoding="utf-8"?>
 <p:sld xmlns:a="http://schemas.openxmlformats.org/drawingml/2006/main" xmlns:r="http://schemas.openxmlformats.org/officeDocument/2006/relationships" xmlns:p="http://schemas.openxmlformats.org/presentationml/2006/main">
-  <p:cSld name="Slide 4">
-    <p:bg>
-      <p:bgPr>
-        <a:solidFill>
-          <a:srgbClr val="F1F7F8"/>
-        </a:solidFill>
-        <a:effectLst/>
-      </p:bgPr>
-    </p:bg>
-    <p:spTree>
-      <p:nvGrpSpPr>
-        <p:cNvPr id="1" name=""/>
-        <p:cNvGrpSpPr/>
-        <p:nvPr/>
-      </p:nvGrpSpPr>
-      <p:grpSpPr>
-        <a:xfrm>
-          <a:off x="0" y="0"/>
-          <a:ext cx="0" cy="0"/>
-          <a:chOff x="0" y="0"/>
-          <a:chExt cx="0" cy="0"/>
-        </a:xfrm>
-      </p:grpSpPr>
-      <p:sp>
-        <p:nvSpPr>
-          <p:cNvPr id="2" name="Shape 0"/>
-          <p:cNvSpPr/>
-          <p:nvPr/>
-        </p:nvSpPr>
-        <p:spPr>
-          <a:xfrm>
-            <a:off x="822960" y="566928"/>
-            <a:ext cx="868680" cy="868680"/>
-          </a:xfrm>
-          <a:prstGeom prst="ellipse">
-            <a:avLst/>
-          </a:prstGeom>
-          <a:solidFill>
-            <a:srgbClr val="0E7C86"/>
-          </a:solidFill>
-          <a:ln/>
-          <a:effectLst>
-            <a:outerShdw blurRad="114300" dist="38100" dir="5400000" algn="bl" rotWithShape="0">
-              <a:srgbClr val="0A2E36">
-                <a:alpha val="16000"/>
-              </a:srgbClr>
-            </a:outerShdw>
-          </a:effectLst>
-        </p:spPr>
-      </p:sp>
-      <p:pic>
-        <p:nvPicPr>
-          <p:cNvPr id="3" name="Image 0" descr="preencoded.png"/>
-          <p:cNvPicPr>
-            <a:picLocks noChangeAspect="1"/>
-          </p:cNvPicPr>
-          <p:nvPr/>
-        </p:nvPicPr>
-        <p:blipFill>
-          <a:blip r:embed="rId3"/>
-          <a:stretch>
-            <a:fillRect/>
-          </a:stretch>
-        </p:blipFill>
-        <p:spPr>
-          <a:xfrm>
-            <a:off x="1033272" y="777240"/>
-            <a:ext cx="448056" cy="448056"/>
-          </a:xfrm>
-          <a:prstGeom prst="rect">
-            <a:avLst/>
-          </a:prstGeom>
-        </p:spPr>
-      </p:pic>
-      <p:sp>
-        <p:nvSpPr>
-          <p:cNvPr id="4" name="Text 1"/>
-          <p:cNvSpPr/>
-          <p:nvPr/>
-        </p:nvSpPr>
-        <p:spPr>
-          <a:xfrm>
-            <a:off x="1874520" y="621792"/>
-            <a:ext cx="9144000" cy="292608"/>
-          </a:xfrm>
-          <a:prstGeom prst="rect">
-            <a:avLst/>
-          </a:prstGeom>
-          <a:noFill/>
-          <a:ln/>
-        </p:spPr>
-        <p:txBody>
-          <a:bodyPr wrap="square" lIns="0" tIns="0" rIns="0" bIns="0" rtlCol="0" anchor="ctr"/>
-          <a:lstStyle/>
-          <a:p>
-            <a:pPr marL="0" indent="0">
-              <a:buNone/>
-            </a:pPr>
-            <a:r>
-              <a:rPr lang="en-US" sz="1250" b="1" kern="0" spc="300" dirty="0">
-                <a:solidFill>
-                  <a:srgbClr val="0E7C86"/>
-                </a:solidFill>
-                <a:latin typeface="Calibri" pitchFamily="34" charset="0"/>
-                <a:ea typeface="Calibri" pitchFamily="34" charset="-122"/>
-                <a:cs typeface="Calibri" pitchFamily="34" charset="-120"/>
-              </a:rPr>
-              <a:t>OBJECTIVES OF THE STUDY</a:t>
-            </a:r>
-            <a:endParaRPr lang="en-US" sz="1250" dirty="0"/>
-          </a:p>
-        </p:txBody>
-      </p:sp>
-      <p:sp>
-        <p:nvSpPr>
-          <p:cNvPr id="5" name="Text 2"/>
-          <p:cNvSpPr/>
-          <p:nvPr/>
-        </p:nvSpPr>
-        <p:spPr>
-          <a:xfrm>
-            <a:off x="1828800" y="868680"/>
-            <a:ext cx="9692640" cy="640080"/>
-          </a:xfrm>
-          <a:prstGeom prst="rect">
-            <a:avLst/>
-          </a:prstGeom>
-          <a:noFill/>
-          <a:ln/>
-        </p:spPr>
-        <p:txBody>
-          <a:bodyPr wrap="square" lIns="0" tIns="0" rIns="0" bIns="0" rtlCol="0" anchor="ctr"/>
-          <a:lstStyle/>
-          <a:p>
-            <a:pPr marL="0" indent="0">
-              <a:buNone/>
-            </a:pPr>
-            <a:r>
-              <a:rPr lang="en-US" sz="3400" b="1" dirty="0">
-                <a:solidFill>
-                  <a:srgbClr val="1B2B2E"/>
-                </a:solidFill>
-                <a:latin typeface="Cambria" pitchFamily="34" charset="0"/>
-                <a:ea typeface="Cambria" pitchFamily="34" charset="-122"/>
-                <a:cs typeface="Cambria" pitchFamily="34" charset="-120"/>
-              </a:rPr>
-              <a:t>What we aim to find out</a:t>
-            </a:r>
-            <a:endParaRPr lang="en-US" sz="3400" dirty="0"/>
-          </a:p>
-        </p:txBody>
-      </p:sp>
-      <p:sp>
-        <p:nvSpPr>
-          <p:cNvPr id="6" name="Shape 3"/>
-          <p:cNvSpPr/>
-          <p:nvPr/>
-        </p:nvSpPr>
-        <p:spPr>
-          <a:xfrm>
-            <a:off x="822960" y="1874520"/>
-            <a:ext cx="10515600" cy="1828800"/>
-          </a:xfrm>
-          <a:prstGeom prst="roundRect">
-            <a:avLst>
-              <a:gd name="adj" fmla="val 5000"/>
-            </a:avLst>
-          </a:prstGeom>
-          <a:solidFill>
-            <a:srgbClr val="0D3B45"/>
-          </a:solidFill>
-          <a:ln/>
-          <a:effectLst>
-            <a:outerShdw blurRad="114300" dist="38100" dir="5400000" algn="bl" rotWithShape="0">
-              <a:srgbClr val="0A2E36">
-                <a:alpha val="16000"/>
-              </a:srgbClr>
-            </a:outerShdw>
-          </a:effectLst>
-        </p:spPr>
-      </p:sp>
-      <p:sp>
-        <p:nvSpPr>
-          <p:cNvPr id="7" name="Text 4"/>
-          <p:cNvSpPr/>
-          <p:nvPr/>
-        </p:nvSpPr>
-        <p:spPr>
-          <a:xfrm>
-            <a:off x="1143000" y="2103120"/>
-            <a:ext cx="9144000" cy="320040"/>
-          </a:xfrm>
-          <a:prstGeom prst="rect">
-            <a:avLst/>
-          </a:prstGeom>
-          <a:noFill/>
-          <a:ln/>
-        </p:spPr>
-        <p:txBody>
-          <a:bodyPr wrap="square" lIns="0" tIns="0" rIns="0" bIns="0" rtlCol="0" anchor="ctr"/>
-          <a:lstStyle/>
-          <a:p>
-            <a:pPr marL="0" indent="0">
-              <a:buNone/>
-            </a:pPr>
-            <a:r>
-              <a:rPr lang="en-US" sz="1300" b="1" kern="0" spc="200" dirty="0">
-                <a:solidFill>
-                  <a:srgbClr val="F6C57A"/>
-                </a:solidFill>
-                <a:latin typeface="Calibri" pitchFamily="34" charset="0"/>
-                <a:ea typeface="Calibri" pitchFamily="34" charset="-122"/>
-                <a:cs typeface="Calibri" pitchFamily="34" charset="-120"/>
-              </a:rPr>
-              <a:t>GENERAL OBJECTIVE</a:t>
-            </a:r>
-            <a:endParaRPr lang="en-US" sz="1300" dirty="0"/>
-          </a:p>
-        </p:txBody>
-      </p:sp>
-      <p:sp>
-        <p:nvSpPr>
-          <p:cNvPr id="8" name="Text 5"/>
-          <p:cNvSpPr/>
-          <p:nvPr/>
-        </p:nvSpPr>
-        <p:spPr>
-          <a:xfrm>
-            <a:off x="1143000" y="2468880"/>
-            <a:ext cx="9875520" cy="1097280"/>
-          </a:xfrm>
-          <a:prstGeom prst="rect">
-            <a:avLst/>
-          </a:prstGeom>
-          <a:noFill/>
-          <a:ln/>
-        </p:spPr>
-        <p:txBody>
-          <a:bodyPr wrap="square" lIns="0" tIns="0" rIns="0" bIns="0" rtlCol="0" anchor="t"/>
-          <a:lstStyle/>
-          <a:p>
-            <a:pPr marL="0" indent="0">
-              <a:lnSpc>
-                <a:spcPts val="2800"/>
-              </a:lnSpc>
-              <a:buNone/>
-            </a:pPr>
-            <a:r>
-              <a:rPr lang="en-US" sz="2100" dirty="0">
-                <a:solidFill>
-                  <a:srgbClr val="FFFFFF"/>
-                </a:solidFill>
-                <a:latin typeface="Calibri" pitchFamily="34" charset="0"/>
-                <a:ea typeface="Calibri" pitchFamily="34" charset="-122"/>
-                <a:cs typeface="Calibri" pitchFamily="34" charset="-120"/>
-              </a:rPr>
-              <a:t>To determine whether </a:t>
-            </a:r>
-            <a:r>
-              <a:rPr lang="en-US" sz="2100" b="1" dirty="0">
-                <a:solidFill>
-                  <a:srgbClr val="F6C57A"/>
-                </a:solidFill>
-                <a:latin typeface="Calibri" pitchFamily="34" charset="0"/>
-                <a:ea typeface="Calibri" pitchFamily="34" charset="-122"/>
-                <a:cs typeface="Calibri" pitchFamily="34" charset="-120"/>
-              </a:rPr>
-              <a:t>MaestrAI</a:t>
-            </a:r>
-            <a:r>
-              <a:rPr lang="en-US" sz="2100" dirty="0">
-                <a:solidFill>
-                  <a:srgbClr val="FFFFFF"/>
-                </a:solidFill>
-                <a:latin typeface="Calibri" pitchFamily="34" charset="0"/>
-                <a:ea typeface="Calibri" pitchFamily="34" charset="-122"/>
-                <a:cs typeface="Calibri" pitchFamily="34" charset="-120"/>
-              </a:rPr>
-              <a:t> or the existing </a:t>
-            </a:r>
-            <a:r>
-              <a:rPr lang="en-US" sz="2100" b="1" dirty="0">
-                <a:solidFill>
-                  <a:srgbClr val="F6C57A"/>
-                </a:solidFill>
-                <a:latin typeface="Calibri" pitchFamily="34" charset="0"/>
-                <a:ea typeface="Calibri" pitchFamily="34" charset="-122"/>
-                <a:cs typeface="Calibri" pitchFamily="34" charset="-120"/>
-              </a:rPr>
-              <a:t>GradeChum</a:t>
-            </a:r>
-            <a:r>
-              <a:rPr lang="en-US" sz="2100" dirty="0">
-                <a:solidFill>
-                  <a:srgbClr val="FFFFFF"/>
-                </a:solidFill>
-                <a:latin typeface="Calibri" pitchFamily="34" charset="0"/>
-                <a:ea typeface="Calibri" pitchFamily="34" charset="-122"/>
-                <a:cs typeface="Calibri" pitchFamily="34" charset="-120"/>
-              </a:rPr>
-              <a:t> system performs better at grading handwritten programming assessments.</a:t>
-            </a:r>
-            <a:endParaRPr lang="en-US" sz="2100" dirty="0"/>
-          </a:p>
-        </p:txBody>
-      </p:sp>
-      <p:sp>
-        <p:nvSpPr>
-          <p:cNvPr id="9" name="Shape 6"/>
-          <p:cNvSpPr/>
-          <p:nvPr/>
-        </p:nvSpPr>
-        <p:spPr>
-          <a:xfrm>
-            <a:off x="822960" y="3931920"/>
-            <a:ext cx="10515600" cy="2148840"/>
-          </a:xfrm>
-          <a:prstGeom prst="roundRect">
-            <a:avLst>
-              <a:gd name="adj" fmla="val 4255"/>
-            </a:avLst>
-          </a:prstGeom>
-          <a:solidFill>
-            <a:srgbClr val="FFFFFF"/>
-          </a:solidFill>
-          <a:ln w="12700">
-            <a:solidFill>
-              <a:srgbClr val="E8943A"/>
-            </a:solidFill>
-            <a:prstDash val="dash"/>
-          </a:ln>
-          <a:effectLst>
-            <a:outerShdw blurRad="114300" dist="38100" dir="5400000" algn="bl" rotWithShape="0">
-              <a:srgbClr val="0A2E36">
-                <a:alpha val="16000"/>
-              </a:srgbClr>
-            </a:outerShdw>
-          </a:effectLst>
-        </p:spPr>
-      </p:sp>
-      <p:sp>
-        <p:nvSpPr>
-          <p:cNvPr id="10" name="Shape 7"/>
-          <p:cNvSpPr/>
-          <p:nvPr/>
-        </p:nvSpPr>
-        <p:spPr>
-          <a:xfrm>
-            <a:off x="1097280" y="4224528"/>
-            <a:ext cx="566928" cy="566928"/>
-          </a:xfrm>
-          <a:prstGeom prst="ellipse">
-            <a:avLst/>
-          </a:prstGeom>
-          <a:solidFill>
-            <a:srgbClr val="EAF3F4"/>
-          </a:solidFill>
-          <a:ln/>
-        </p:spPr>
-      </p:sp>
-      <p:pic>
-        <p:nvPicPr>
-          <p:cNvPr id="11" name="Image 1" descr="preencoded.png"/>
-          <p:cNvPicPr>
-            <a:picLocks noChangeAspect="1"/>
-          </p:cNvPicPr>
-          <p:nvPr/>
-        </p:nvPicPr>
-        <p:blipFill>
-          <a:blip r:embed="rId4"/>
-          <a:stretch>
-            <a:fillRect/>
-          </a:stretch>
-        </p:blipFill>
-        <p:spPr>
-          <a:xfrm>
-            <a:off x="1225296" y="4352544"/>
-            <a:ext cx="310896" cy="310896"/>
-          </a:xfrm>
-          <a:prstGeom prst="rect">
-            <a:avLst/>
-          </a:prstGeom>
-        </p:spPr>
-      </p:pic>
-      <p:sp>
-        <p:nvSpPr>
-          <p:cNvPr id="12" name="Text 8"/>
-          <p:cNvSpPr/>
-          <p:nvPr/>
-        </p:nvSpPr>
-        <p:spPr>
-          <a:xfrm>
-            <a:off x="1783080" y="4206240"/>
-            <a:ext cx="9326880" cy="365760"/>
-          </a:xfrm>
-          <a:prstGeom prst="rect">
-            <a:avLst/>
-          </a:prstGeom>
-          <a:noFill/>
-          <a:ln/>
-        </p:spPr>
-        <p:txBody>
-          <a:bodyPr wrap="square" lIns="0" tIns="0" rIns="0" bIns="0" rtlCol="0" anchor="ctr"/>
-          <a:lstStyle/>
-          <a:p>
-            <a:pPr marL="0" indent="0">
-              <a:buNone/>
-            </a:pPr>
-            <a:r>
-              <a:rPr lang="en-US" sz="1350" b="1" kern="0" spc="100" dirty="0">
-                <a:solidFill>
-                  <a:srgbClr val="5A6B6E"/>
-                </a:solidFill>
-                <a:latin typeface="Calibri" pitchFamily="34" charset="0"/>
-                <a:ea typeface="Calibri" pitchFamily="34" charset="-122"/>
-                <a:cs typeface="Calibri" pitchFamily="34" charset="-120"/>
-              </a:rPr>
-              <a:t>SPECIFIC OBJECTIVES  —  to be finalized with your adviser</a:t>
-            </a:r>
-            <a:endParaRPr lang="en-US" sz="1350" dirty="0"/>
-          </a:p>
-        </p:txBody>
-      </p:sp>
-      <p:sp>
-        <p:nvSpPr>
-          <p:cNvPr id="13" name="Text 9"/>
-          <p:cNvSpPr/>
-          <p:nvPr/>
-        </p:nvSpPr>
-        <p:spPr>
-          <a:xfrm>
-            <a:off x="1783080" y="4617720"/>
-            <a:ext cx="9235440" cy="1325880"/>
-          </a:xfrm>
-          <a:prstGeom prst="rect">
-            <a:avLst/>
-          </a:prstGeom>
-          <a:noFill/>
-          <a:ln/>
-        </p:spPr>
-        <p:txBody>
-          <a:bodyPr wrap="square" lIns="0" tIns="0" rIns="0" bIns="0" rtlCol="0" anchor="t"/>
-          <a:lstStyle/>
-          <a:p>
-            <a:pPr marL="177800" indent="-177800">
-              <a:lnSpc>
-                <a:spcPts val="2400"/>
-              </a:lnSpc>
-              <a:buSzPct val="100000"/>
-              <a:buChar char="•"/>
-            </a:pPr>
-            <a:r>
-              <a:rPr lang="en-US" sz="1500" i="1" dirty="0">
-                <a:solidFill>
-                  <a:srgbClr val="5A6B6E"/>
-                </a:solidFill>
-                <a:latin typeface="Calibri" pitchFamily="34" charset="0"/>
-                <a:ea typeface="Calibri" pitchFamily="34" charset="-122"/>
-                <a:cs typeface="Calibri" pitchFamily="34" charset="-120"/>
-              </a:rPr>
-              <a:t>[ Define the criteria for comparison — e.g. accuracy of grading, time taken, consistency of scores, quality of feedback ]</a:t>
-            </a:r>
-            <a:endParaRPr lang="en-US" sz="1500" dirty="0"/>
-          </a:p>
-          <a:p>
-            <a:pPr marL="0" indent="0">
-              <a:lnSpc>
-                <a:spcPts val="2400"/>
-              </a:lnSpc>
-              <a:buNone/>
-            </a:pPr>
-            <a:r>
-              <a:rPr lang="en-US" sz="1500" i="1" dirty="0">
-                <a:solidFill>
-                  <a:srgbClr val="5A6B6E"/>
-                </a:solidFill>
-                <a:latin typeface="Calibri" pitchFamily="34" charset="0"/>
-                <a:ea typeface="Calibri" pitchFamily="34" charset="-122"/>
-                <a:cs typeface="Calibri" pitchFamily="34" charset="-120"/>
-              </a:rPr>
-              <a:t>[ Specify the dataset / subjects and the programming assessments to be used ]</a:t>
-            </a:r>
-            <a:endParaRPr lang="en-US" sz="1500" dirty="0"/>
-          </a:p>
-          <a:p>
-            <a:pPr marL="0" indent="0">
-              <a:lnSpc>
-                <a:spcPts val="2400"/>
-              </a:lnSpc>
-              <a:buNone/>
-            </a:pPr>
-            <a:r>
-              <a:rPr lang="en-US" sz="1500" i="1" dirty="0">
-                <a:solidFill>
-                  <a:srgbClr val="5A6B6E"/>
-                </a:solidFill>
-                <a:latin typeface="Calibri" pitchFamily="34" charset="0"/>
-                <a:ea typeface="Calibri" pitchFamily="34" charset="-122"/>
-                <a:cs typeface="Calibri" pitchFamily="34" charset="-120"/>
-              </a:rPr>
-              <a:t>[ State how MaestrAI and GradeChum results will be measured and compared ]</a:t>
-            </a:r>
-            <a:endParaRPr lang="en-US" sz="1500" dirty="0"/>
-          </a:p>
-        </p:txBody>
-      </p:sp>
-    </p:spTree>
-  </p:cSld>
-  <p:clrMapOvr>
-    <a:masterClrMapping/>
-  </p:clrMapOvr>
-</p:sld>
-</file>
-
-<file path=ppt/slides/slide5.xml><?xml version="1.0" encoding="utf-8"?>
-<p:sld xmlns:a="http://schemas.openxmlformats.org/drawingml/2006/main" xmlns:r="http://schemas.openxmlformats.org/officeDocument/2006/relationships" xmlns:p="http://schemas.openxmlformats.org/presentationml/2006/main">
   <p:cSld name="Slide 5">
     <p:bg>
       <p:bgPr>
@@ -4433,634 +3473,7 @@
 </p:sld>
 </file>
 
-<file path=ppt/slides/slide6.xml><?xml version="1.0" encoding="utf-8"?>
-<p:sld xmlns:a="http://schemas.openxmlformats.org/drawingml/2006/main" xmlns:r="http://schemas.openxmlformats.org/officeDocument/2006/relationships" xmlns:p="http://schemas.openxmlformats.org/presentationml/2006/main">
-  <p:cSld name="Slide 6">
-    <p:bg>
-      <p:bgPr>
-        <a:solidFill>
-          <a:srgbClr val="F1F7F8"/>
-        </a:solidFill>
-        <a:effectLst/>
-      </p:bgPr>
-    </p:bg>
-    <p:spTree>
-      <p:nvGrpSpPr>
-        <p:cNvPr id="1" name=""/>
-        <p:cNvGrpSpPr/>
-        <p:nvPr/>
-      </p:nvGrpSpPr>
-      <p:grpSpPr>
-        <a:xfrm>
-          <a:off x="0" y="0"/>
-          <a:ext cx="0" cy="0"/>
-          <a:chOff x="0" y="0"/>
-          <a:chExt cx="0" cy="0"/>
-        </a:xfrm>
-      </p:grpSpPr>
-      <p:sp>
-        <p:nvSpPr>
-          <p:cNvPr id="2" name="Shape 0"/>
-          <p:cNvSpPr/>
-          <p:nvPr/>
-        </p:nvSpPr>
-        <p:spPr>
-          <a:xfrm>
-            <a:off x="822960" y="566928"/>
-            <a:ext cx="868680" cy="868680"/>
-          </a:xfrm>
-          <a:prstGeom prst="ellipse">
-            <a:avLst/>
-          </a:prstGeom>
-          <a:solidFill>
-            <a:srgbClr val="0E7C86"/>
-          </a:solidFill>
-          <a:ln/>
-          <a:effectLst>
-            <a:outerShdw blurRad="114300" dist="38100" dir="5400000" algn="bl" rotWithShape="0">
-              <a:srgbClr val="0A2E36">
-                <a:alpha val="16000"/>
-              </a:srgbClr>
-            </a:outerShdw>
-          </a:effectLst>
-        </p:spPr>
-      </p:sp>
-      <p:pic>
-        <p:nvPicPr>
-          <p:cNvPr id="3" name="Image 0" descr="preencoded.png"/>
-          <p:cNvPicPr>
-            <a:picLocks noChangeAspect="1"/>
-          </p:cNvPicPr>
-          <p:nvPr/>
-        </p:nvPicPr>
-        <p:blipFill>
-          <a:blip r:embed="rId3"/>
-          <a:stretch>
-            <a:fillRect/>
-          </a:stretch>
-        </p:blipFill>
-        <p:spPr>
-          <a:xfrm>
-            <a:off x="1033272" y="777240"/>
-            <a:ext cx="448056" cy="448056"/>
-          </a:xfrm>
-          <a:prstGeom prst="rect">
-            <a:avLst/>
-          </a:prstGeom>
-        </p:spPr>
-      </p:pic>
-      <p:sp>
-        <p:nvSpPr>
-          <p:cNvPr id="4" name="Text 1"/>
-          <p:cNvSpPr/>
-          <p:nvPr/>
-        </p:nvSpPr>
-        <p:spPr>
-          <a:xfrm>
-            <a:off x="1874520" y="621792"/>
-            <a:ext cx="9144000" cy="292608"/>
-          </a:xfrm>
-          <a:prstGeom prst="rect">
-            <a:avLst/>
-          </a:prstGeom>
-          <a:noFill/>
-          <a:ln/>
-        </p:spPr>
-        <p:txBody>
-          <a:bodyPr wrap="square" lIns="0" tIns="0" rIns="0" bIns="0" rtlCol="0" anchor="ctr"/>
-          <a:lstStyle/>
-          <a:p>
-            <a:pPr marL="0" indent="0">
-              <a:buNone/>
-            </a:pPr>
-            <a:r>
-              <a:rPr lang="en-US" sz="1250" b="1" kern="0" spc="300" dirty="0">
-                <a:solidFill>
-                  <a:srgbClr val="0E7C86"/>
-                </a:solidFill>
-                <a:latin typeface="Calibri" pitchFamily="34" charset="0"/>
-                <a:ea typeface="Calibri" pitchFamily="34" charset="-122"/>
-                <a:cs typeface="Calibri" pitchFamily="34" charset="-120"/>
-              </a:rPr>
-              <a:t>COMPARATIVE CONTEXT</a:t>
-            </a:r>
-            <a:endParaRPr lang="en-US" sz="1250" dirty="0"/>
-          </a:p>
-        </p:txBody>
-      </p:sp>
-      <p:sp>
-        <p:nvSpPr>
-          <p:cNvPr id="5" name="Text 2"/>
-          <p:cNvSpPr/>
-          <p:nvPr/>
-        </p:nvSpPr>
-        <p:spPr>
-          <a:xfrm>
-            <a:off x="1828800" y="868680"/>
-            <a:ext cx="9692640" cy="640080"/>
-          </a:xfrm>
-          <a:prstGeom prst="rect">
-            <a:avLst/>
-          </a:prstGeom>
-          <a:noFill/>
-          <a:ln/>
-        </p:spPr>
-        <p:txBody>
-          <a:bodyPr wrap="square" lIns="0" tIns="0" rIns="0" bIns="0" rtlCol="0" anchor="ctr"/>
-          <a:lstStyle/>
-          <a:p>
-            <a:pPr marL="0" indent="0">
-              <a:buNone/>
-            </a:pPr>
-            <a:r>
-              <a:rPr lang="en-US" sz="3400" b="1" dirty="0">
-                <a:solidFill>
-                  <a:srgbClr val="1B2B2E"/>
-                </a:solidFill>
-                <a:latin typeface="Cambria" pitchFamily="34" charset="0"/>
-                <a:ea typeface="Cambria" pitchFamily="34" charset="-122"/>
-                <a:cs typeface="Cambria" pitchFamily="34" charset="-120"/>
-              </a:rPr>
-              <a:t>GradeChum vs MaestrAI</a:t>
-            </a:r>
-            <a:endParaRPr lang="en-US" sz="3400" dirty="0"/>
-          </a:p>
-        </p:txBody>
-      </p:sp>
-      <p:sp>
-        <p:nvSpPr>
-          <p:cNvPr id="6" name="Shape 3"/>
-          <p:cNvSpPr/>
-          <p:nvPr/>
-        </p:nvSpPr>
-        <p:spPr>
-          <a:xfrm>
-            <a:off x="822960" y="1874520"/>
-            <a:ext cx="5138928" cy="3703320"/>
-          </a:xfrm>
-          <a:prstGeom prst="roundRect">
-            <a:avLst>
-              <a:gd name="adj" fmla="val 2469"/>
-            </a:avLst>
-          </a:prstGeom>
-          <a:solidFill>
-            <a:srgbClr val="FFFFFF"/>
-          </a:solidFill>
-          <a:ln/>
-          <a:effectLst>
-            <a:outerShdw blurRad="114300" dist="38100" dir="5400000" algn="bl" rotWithShape="0">
-              <a:srgbClr val="0A2E36">
-                <a:alpha val="16000"/>
-              </a:srgbClr>
-            </a:outerShdw>
-          </a:effectLst>
-        </p:spPr>
-      </p:sp>
-      <p:sp>
-        <p:nvSpPr>
-          <p:cNvPr id="7" name="Text 4"/>
-          <p:cNvSpPr/>
-          <p:nvPr/>
-        </p:nvSpPr>
-        <p:spPr>
-          <a:xfrm>
-            <a:off x="1143000" y="2103120"/>
-            <a:ext cx="4572000" cy="502920"/>
-          </a:xfrm>
-          <a:prstGeom prst="rect">
-            <a:avLst/>
-          </a:prstGeom>
-          <a:noFill/>
-          <a:ln/>
-        </p:spPr>
-        <p:txBody>
-          <a:bodyPr wrap="square" lIns="0" tIns="0" rIns="0" bIns="0" rtlCol="0" anchor="ctr"/>
-          <a:lstStyle/>
-          <a:p>
-            <a:pPr marL="0" indent="0">
-              <a:buNone/>
-            </a:pPr>
-            <a:r>
-              <a:rPr lang="en-US" sz="2400" b="1" dirty="0">
-                <a:solidFill>
-                  <a:srgbClr val="1B2B2E"/>
-                </a:solidFill>
-                <a:latin typeface="Cambria" pitchFamily="34" charset="0"/>
-                <a:ea typeface="Cambria" pitchFamily="34" charset="-122"/>
-                <a:cs typeface="Cambria" pitchFamily="34" charset="-120"/>
-              </a:rPr>
-              <a:t>GradeChum</a:t>
-            </a:r>
-            <a:endParaRPr lang="en-US" sz="2400" dirty="0"/>
-          </a:p>
-        </p:txBody>
-      </p:sp>
-      <p:sp>
-        <p:nvSpPr>
-          <p:cNvPr id="8" name="Text 5"/>
-          <p:cNvSpPr/>
-          <p:nvPr/>
-        </p:nvSpPr>
-        <p:spPr>
-          <a:xfrm>
-            <a:off x="1143000" y="2606040"/>
-            <a:ext cx="4572000" cy="274320"/>
-          </a:xfrm>
-          <a:prstGeom prst="rect">
-            <a:avLst/>
-          </a:prstGeom>
-          <a:noFill/>
-          <a:ln/>
-        </p:spPr>
-        <p:txBody>
-          <a:bodyPr wrap="square" lIns="0" tIns="0" rIns="0" bIns="0" rtlCol="0" anchor="ctr"/>
-          <a:lstStyle/>
-          <a:p>
-            <a:pPr marL="0" indent="0">
-              <a:buNone/>
-            </a:pPr>
-            <a:r>
-              <a:rPr lang="en-US" sz="1150" b="1" kern="0" spc="200" dirty="0">
-                <a:solidFill>
-                  <a:srgbClr val="0E7C86"/>
-                </a:solidFill>
-                <a:latin typeface="Calibri" pitchFamily="34" charset="0"/>
-                <a:ea typeface="Calibri" pitchFamily="34" charset="-122"/>
-                <a:cs typeface="Calibri" pitchFamily="34" charset="-120"/>
-              </a:rPr>
-              <a:t>EXISTING TOOL  •  BASELINE</a:t>
-            </a:r>
-            <a:endParaRPr lang="en-US" sz="1150" dirty="0"/>
-          </a:p>
-        </p:txBody>
-      </p:sp>
-      <p:sp>
-        <p:nvSpPr>
-          <p:cNvPr id="9" name="Text 6"/>
-          <p:cNvSpPr/>
-          <p:nvPr/>
-        </p:nvSpPr>
-        <p:spPr>
-          <a:xfrm>
-            <a:off x="1143000" y="2971800"/>
-            <a:ext cx="4572000" cy="2286000"/>
-          </a:xfrm>
-          <a:prstGeom prst="rect">
-            <a:avLst/>
-          </a:prstGeom>
-          <a:noFill/>
-          <a:ln/>
-        </p:spPr>
-        <p:txBody>
-          <a:bodyPr wrap="square" lIns="0" tIns="0" rIns="0" bIns="0" rtlCol="0" anchor="t"/>
-          <a:lstStyle/>
-          <a:p>
-            <a:pPr marL="342900" indent="-342900">
-              <a:lnSpc>
-                <a:spcPts val="2100"/>
-              </a:lnSpc>
-              <a:spcAft>
-                <a:spcPts val="600"/>
-              </a:spcAft>
-              <a:buSzPct val="100000"/>
-              <a:buChar char="•"/>
-            </a:pPr>
-            <a:r>
-              <a:rPr lang="en-US" sz="1450" dirty="0">
-                <a:solidFill>
-                  <a:srgbClr val="1B2B2E"/>
-                </a:solidFill>
-                <a:latin typeface="Calibri" pitchFamily="34" charset="0"/>
-                <a:ea typeface="Calibri" pitchFamily="34" charset="-122"/>
-                <a:cs typeface="Calibri" pitchFamily="34" charset="-120"/>
-              </a:rPr>
-              <a:t>AI-powered assistant that grades handwritten tests on paper</a:t>
-            </a:r>
-            <a:endParaRPr lang="en-US" sz="1450" dirty="0"/>
-          </a:p>
-          <a:p>
-            <a:pPr marL="342900" indent="-342900">
-              <a:lnSpc>
-                <a:spcPts val="2100"/>
-              </a:lnSpc>
-              <a:spcAft>
-                <a:spcPts val="600"/>
-              </a:spcAft>
-              <a:buSzPct val="100000"/>
-              <a:buChar char="•"/>
-            </a:pPr>
-            <a:r>
-              <a:rPr lang="en-US" sz="1450" dirty="0">
-                <a:solidFill>
-                  <a:srgbClr val="1B2B2E"/>
-                </a:solidFill>
-                <a:latin typeface="Calibri" pitchFamily="34" charset="0"/>
-                <a:ea typeface="Calibri" pitchFamily="34" charset="-122"/>
-                <a:cs typeface="Calibri" pitchFamily="34" charset="-120"/>
-              </a:rPr>
-              <a:t>Handles multiple choice, problem solving, and essays</a:t>
-            </a:r>
-            <a:endParaRPr lang="en-US" sz="1450" dirty="0"/>
-          </a:p>
-          <a:p>
-            <a:pPr marL="342900" indent="-342900">
-              <a:lnSpc>
-                <a:spcPts val="2100"/>
-              </a:lnSpc>
-              <a:spcAft>
-                <a:spcPts val="600"/>
-              </a:spcAft>
-              <a:buSzPct val="100000"/>
-              <a:buChar char="•"/>
-            </a:pPr>
-            <a:r>
-              <a:rPr lang="en-US" sz="1450" dirty="0">
-                <a:solidFill>
-                  <a:srgbClr val="1B2B2E"/>
-                </a:solidFill>
-                <a:latin typeface="Calibri" pitchFamily="34" charset="0"/>
-                <a:ea typeface="Calibri" pitchFamily="34" charset="-122"/>
-                <a:cs typeface="Calibri" pitchFamily="34" charset="-120"/>
-              </a:rPr>
-              <a:t>Described as the first AI-powered grading tool in the Philippines</a:t>
-            </a:r>
-            <a:endParaRPr lang="en-US" sz="1450" dirty="0"/>
-          </a:p>
-          <a:p>
-            <a:pPr marL="342900" indent="-342900">
-              <a:lnSpc>
-                <a:spcPts val="2100"/>
-              </a:lnSpc>
-              <a:spcAft>
-                <a:spcPts val="600"/>
-              </a:spcAft>
-              <a:buSzPct val="100000"/>
-              <a:buChar char="•"/>
-            </a:pPr>
-            <a:r>
-              <a:rPr lang="en-US" sz="1450" dirty="0">
-                <a:solidFill>
-                  <a:srgbClr val="1B2B2E"/>
-                </a:solidFill>
-                <a:latin typeface="Calibri" pitchFamily="34" charset="0"/>
-                <a:ea typeface="Calibri" pitchFamily="34" charset="-122"/>
-                <a:cs typeface="Calibri" pitchFamily="34" charset="-120"/>
-              </a:rPr>
-              <a:t>General-purpose across subjects — not specialised for code</a:t>
-            </a:r>
-            <a:endParaRPr lang="en-US" sz="1450" dirty="0"/>
-          </a:p>
-        </p:txBody>
-      </p:sp>
-      <p:sp>
-        <p:nvSpPr>
-          <p:cNvPr id="10" name="Shape 7"/>
-          <p:cNvSpPr/>
-          <p:nvPr/>
-        </p:nvSpPr>
-        <p:spPr>
-          <a:xfrm>
-            <a:off x="6309360" y="1874520"/>
-            <a:ext cx="5029200" cy="3703320"/>
-          </a:xfrm>
-          <a:prstGeom prst="roundRect">
-            <a:avLst>
-              <a:gd name="adj" fmla="val 2469"/>
-            </a:avLst>
-          </a:prstGeom>
-          <a:solidFill>
-            <a:srgbClr val="0D3B45"/>
-          </a:solidFill>
-          <a:ln/>
-          <a:effectLst>
-            <a:outerShdw blurRad="114300" dist="38100" dir="5400000" algn="bl" rotWithShape="0">
-              <a:srgbClr val="0A2E36">
-                <a:alpha val="16000"/>
-              </a:srgbClr>
-            </a:outerShdw>
-          </a:effectLst>
-        </p:spPr>
-      </p:sp>
-      <p:sp>
-        <p:nvSpPr>
-          <p:cNvPr id="11" name="Text 8"/>
-          <p:cNvSpPr/>
-          <p:nvPr/>
-        </p:nvSpPr>
-        <p:spPr>
-          <a:xfrm>
-            <a:off x="6629400" y="2103120"/>
-            <a:ext cx="4572000" cy="502920"/>
-          </a:xfrm>
-          <a:prstGeom prst="rect">
-            <a:avLst/>
-          </a:prstGeom>
-          <a:noFill/>
-          <a:ln/>
-        </p:spPr>
-        <p:txBody>
-          <a:bodyPr wrap="square" lIns="0" tIns="0" rIns="0" bIns="0" rtlCol="0" anchor="ctr"/>
-          <a:lstStyle/>
-          <a:p>
-            <a:pPr marL="0" indent="0">
-              <a:buNone/>
-            </a:pPr>
-            <a:r>
-              <a:rPr lang="en-US" sz="2400" b="1" dirty="0">
-                <a:solidFill>
-                  <a:srgbClr val="FFFFFF"/>
-                </a:solidFill>
-                <a:latin typeface="Cambria" pitchFamily="34" charset="0"/>
-                <a:ea typeface="Cambria" pitchFamily="34" charset="-122"/>
-                <a:cs typeface="Cambria" pitchFamily="34" charset="-120"/>
-              </a:rPr>
-              <a:t>MaestrAI</a:t>
-            </a:r>
-            <a:endParaRPr lang="en-US" sz="2400" dirty="0"/>
-          </a:p>
-        </p:txBody>
-      </p:sp>
-      <p:sp>
-        <p:nvSpPr>
-          <p:cNvPr id="12" name="Text 9"/>
-          <p:cNvSpPr/>
-          <p:nvPr/>
-        </p:nvSpPr>
-        <p:spPr>
-          <a:xfrm>
-            <a:off x="6629400" y="2606040"/>
-            <a:ext cx="4572000" cy="274320"/>
-          </a:xfrm>
-          <a:prstGeom prst="rect">
-            <a:avLst/>
-          </a:prstGeom>
-          <a:noFill/>
-          <a:ln/>
-        </p:spPr>
-        <p:txBody>
-          <a:bodyPr wrap="square" lIns="0" tIns="0" rIns="0" bIns="0" rtlCol="0" anchor="ctr"/>
-          <a:lstStyle/>
-          <a:p>
-            <a:pPr marL="0" indent="0">
-              <a:buNone/>
-            </a:pPr>
-            <a:r>
-              <a:rPr lang="en-US" sz="1150" b="1" kern="0" spc="200" dirty="0">
-                <a:solidFill>
-                  <a:srgbClr val="F6C57A"/>
-                </a:solidFill>
-                <a:latin typeface="Calibri" pitchFamily="34" charset="0"/>
-                <a:ea typeface="Calibri" pitchFamily="34" charset="-122"/>
-                <a:cs typeface="Calibri" pitchFamily="34" charset="-120"/>
-              </a:rPr>
-              <a:t>PROPOSED SYSTEM  •  THIS STUDY</a:t>
-            </a:r>
-            <a:endParaRPr lang="en-US" sz="1150" dirty="0"/>
-          </a:p>
-        </p:txBody>
-      </p:sp>
-      <p:sp>
-        <p:nvSpPr>
-          <p:cNvPr id="13" name="Text 10"/>
-          <p:cNvSpPr/>
-          <p:nvPr/>
-        </p:nvSpPr>
-        <p:spPr>
-          <a:xfrm>
-            <a:off x="6629400" y="2971800"/>
-            <a:ext cx="4480560" cy="2286000"/>
-          </a:xfrm>
-          <a:prstGeom prst="rect">
-            <a:avLst/>
-          </a:prstGeom>
-          <a:noFill/>
-          <a:ln/>
-        </p:spPr>
-        <p:txBody>
-          <a:bodyPr wrap="square" lIns="0" tIns="0" rIns="0" bIns="0" rtlCol="0" anchor="t"/>
-          <a:lstStyle/>
-          <a:p>
-            <a:pPr marL="342900" indent="-342900">
-              <a:lnSpc>
-                <a:spcPts val="2100"/>
-              </a:lnSpc>
-              <a:spcAft>
-                <a:spcPts val="600"/>
-              </a:spcAft>
-              <a:buSzPct val="100000"/>
-              <a:buChar char="•"/>
-            </a:pPr>
-            <a:r>
-              <a:rPr lang="en-US" sz="1450" dirty="0">
-                <a:solidFill>
-                  <a:srgbClr val="FFFFFF"/>
-                </a:solidFill>
-                <a:latin typeface="Calibri" pitchFamily="34" charset="0"/>
-                <a:ea typeface="Calibri" pitchFamily="34" charset="-122"/>
-                <a:cs typeface="Calibri" pitchFamily="34" charset="-120"/>
-              </a:rPr>
-              <a:t>Vision-based grading of handwritten assessments</a:t>
-            </a:r>
-            <a:endParaRPr lang="en-US" sz="1450" dirty="0"/>
-          </a:p>
-          <a:p>
-            <a:pPr marL="342900" indent="-342900">
-              <a:lnSpc>
-                <a:spcPts val="2100"/>
-              </a:lnSpc>
-              <a:spcAft>
-                <a:spcPts val="600"/>
-              </a:spcAft>
-              <a:buSzPct val="100000"/>
-              <a:buChar char="•"/>
-            </a:pPr>
-            <a:r>
-              <a:rPr lang="en-US" sz="1450" dirty="0">
-                <a:solidFill>
-                  <a:srgbClr val="FFFFFF"/>
-                </a:solidFill>
-                <a:latin typeface="Calibri" pitchFamily="34" charset="0"/>
-                <a:ea typeface="Calibri" pitchFamily="34" charset="-122"/>
-                <a:cs typeface="Calibri" pitchFamily="34" charset="-120"/>
-              </a:rPr>
-              <a:t>Focused specifically on programming subjects</a:t>
-            </a:r>
-            <a:endParaRPr lang="en-US" sz="1450" dirty="0"/>
-          </a:p>
-          <a:p>
-            <a:pPr marL="342900" indent="-342900">
-              <a:lnSpc>
-                <a:spcPts val="2100"/>
-              </a:lnSpc>
-              <a:spcAft>
-                <a:spcPts val="600"/>
-              </a:spcAft>
-              <a:buSzPct val="100000"/>
-              <a:buChar char="•"/>
-            </a:pPr>
-            <a:r>
-              <a:rPr lang="en-US" sz="1450" dirty="0">
-                <a:solidFill>
-                  <a:srgbClr val="FFFFFF"/>
-                </a:solidFill>
-                <a:latin typeface="Calibri" pitchFamily="34" charset="0"/>
-                <a:ea typeface="Calibri" pitchFamily="34" charset="-122"/>
-                <a:cs typeface="Calibri" pitchFamily="34" charset="-120"/>
-              </a:rPr>
-              <a:t>Aims to deliver grades and feedback to students</a:t>
-            </a:r>
-            <a:endParaRPr lang="en-US" sz="1450" dirty="0"/>
-          </a:p>
-        </p:txBody>
-      </p:sp>
-      <p:sp>
-        <p:nvSpPr>
-          <p:cNvPr id="14" name="Text 11"/>
-          <p:cNvSpPr/>
-          <p:nvPr/>
-        </p:nvSpPr>
-        <p:spPr>
-          <a:xfrm>
-            <a:off x="822960" y="5715000"/>
-            <a:ext cx="10515600" cy="457200"/>
-          </a:xfrm>
-          <a:prstGeom prst="rect">
-            <a:avLst/>
-          </a:prstGeom>
-          <a:noFill/>
-          <a:ln/>
-        </p:spPr>
-        <p:txBody>
-          <a:bodyPr wrap="square" lIns="0" tIns="0" rIns="0" bIns="0" rtlCol="0" anchor="ctr"/>
-          <a:lstStyle/>
-          <a:p>
-            <a:pPr marL="0" indent="0" algn="l">
-              <a:buNone/>
-            </a:pPr>
-            <a:r>
-              <a:rPr lang="en-US" sz="1100" i="1" dirty="0">
-                <a:solidFill>
-                  <a:srgbClr val="5A6B6E"/>
-                </a:solidFill>
-                <a:latin typeface="Calibri" pitchFamily="34" charset="0"/>
-                <a:ea typeface="Calibri" pitchFamily="34" charset="-122"/>
-                <a:cs typeface="Calibri" pitchFamily="34" charset="-120"/>
-              </a:rPr>
-              <a:t>GradeChum details from gradechum.com (verified). MaestrAI details reflect this proposal; comparative performance is what the study will measure.</a:t>
-            </a:r>
-            <a:endParaRPr lang="en-US" sz="1100" dirty="0"/>
-          </a:p>
-        </p:txBody>
-      </p:sp>
-    </p:spTree>
-  </p:cSld>
-  <p:clrMapOvr>
-    <a:masterClrMapping/>
-  </p:clrMapOvr>
-</p:sld>
-</file>
-
-<file path=ppt/slides/slide7.xml><?xml version="1.0" encoding="utf-8"?>
+<file path=ppt/slides/slide5.xml><?xml version="1.0" encoding="utf-8"?>
 <p:sld xmlns:a="http://schemas.openxmlformats.org/drawingml/2006/main" xmlns:r="http://schemas.openxmlformats.org/officeDocument/2006/relationships" xmlns:p="http://schemas.openxmlformats.org/presentationml/2006/main">
   <p:cSld>
     <p:spTree>
@@ -5077,39 +3490,6 @@
           <a:chExt cx="0" cy="0"/>
         </a:xfrm>
       </p:grpSpPr>
-      <p:pic>
-        <p:nvPicPr>
-          <p:cNvPr id="2" name="Picture 1">
-            <a:extLst>
-              <a:ext uri="{FF2B5EF4-FFF2-40B4-BE49-F238E27FC236}">
-                <a16:creationId xmlns:a16="http://schemas.microsoft.com/office/drawing/2014/main" id="{CCA94AAC-5252-FC1E-20DC-2739B80A2733}"/>
-              </a:ext>
-              <a:ext uri="{C183D7F6-B498-43B3-948B-1728B52AA6E4}">
-                <adec:decorative xmlns:adec="http://schemas.microsoft.com/office/drawing/2017/decorative" val="1"/>
-              </a:ext>
-            </a:extLst>
-          </p:cNvPr>
-          <p:cNvPicPr>
-            <a:picLocks noChangeAspect="1"/>
-          </p:cNvPicPr>
-          <p:nvPr/>
-        </p:nvPicPr>
-        <p:blipFill>
-          <a:blip r:embed="rId2"/>
-          <a:stretch>
-            <a:fillRect/>
-          </a:stretch>
-        </p:blipFill>
-        <p:spPr>
-          <a:xfrm>
-            <a:off x="1581927" y="2778911"/>
-            <a:ext cx="9146332" cy="1300177"/>
-          </a:xfrm>
-          <a:prstGeom prst="rect">
-            <a:avLst/>
-          </a:prstGeom>
-        </p:spPr>
-      </p:pic>
       <p:sp>
         <p:nvSpPr>
           <p:cNvPr id="3" name="TextBox 2">
@@ -5124,7 +3504,7 @@
         </p:nvSpPr>
         <p:spPr>
           <a:xfrm>
-            <a:off x="4729621" y="1004988"/>
+            <a:off x="4729621" y="6612"/>
             <a:ext cx="3012675" cy="369332"/>
           </a:xfrm>
           <a:prstGeom prst="rect">
@@ -5234,27 +3614,57 @@
           <a:p>
             <a:pPr algn="ctr"/>
             <a:r>
-              <a:rPr lang="en-US">
+              <a:rPr lang="en-US" dirty="0">
                 <a:ea typeface="Calibri"/>
                 <a:cs typeface="Calibri"/>
               </a:rPr>
               <a:t>Conceptual </a:t>
             </a:r>
             <a:r>
-              <a:rPr lang="en-US">
+              <a:rPr lang="en-US" dirty="0">
                 <a:latin typeface="Times New Roman"/>
                 <a:ea typeface="Calibri"/>
                 <a:cs typeface="Times New Roman"/>
               </a:rPr>
               <a:t>Diagram</a:t>
             </a:r>
-            <a:endParaRPr lang="en-US">
+            <a:endParaRPr lang="en-US" dirty="0">
               <a:latin typeface="Times New Roman"/>
               <a:cs typeface="Times New Roman"/>
             </a:endParaRPr>
           </a:p>
         </p:txBody>
       </p:sp>
+      <p:pic>
+        <p:nvPicPr>
+          <p:cNvPr id="13" name="Picture 12">
+            <a:extLst>
+              <a:ext uri="{FF2B5EF4-FFF2-40B4-BE49-F238E27FC236}">
+                <a16:creationId xmlns:a16="http://schemas.microsoft.com/office/drawing/2014/main" id="{192CFB95-AABD-7CCC-3512-F47B59E60662}"/>
+              </a:ext>
+            </a:extLst>
+          </p:cNvPr>
+          <p:cNvPicPr>
+            <a:picLocks noChangeAspect="1"/>
+          </p:cNvPicPr>
+          <p:nvPr/>
+        </p:nvPicPr>
+        <p:blipFill>
+          <a:blip r:embed="rId2"/>
+          <a:stretch>
+            <a:fillRect/>
+          </a:stretch>
+        </p:blipFill>
+        <p:spPr>
+          <a:xfrm>
+            <a:off x="0" y="1290937"/>
+            <a:ext cx="12192000" cy="4276125"/>
+          </a:xfrm>
+          <a:prstGeom prst="rect">
+            <a:avLst/>
+          </a:prstGeom>
+        </p:spPr>
+      </p:pic>
     </p:spTree>
     <p:extLst>
       <p:ext uri="{BB962C8B-B14F-4D97-AF65-F5344CB8AC3E}">
@@ -5268,7 +3678,7 @@
 </p:sld>
 </file>
 
-<file path=ppt/slides/slide8.xml><?xml version="1.0" encoding="utf-8"?>
+<file path=ppt/slides/slide6.xml><?xml version="1.0" encoding="utf-8"?>
 <p:sld xmlns:a="http://schemas.openxmlformats.org/drawingml/2006/main" xmlns:r="http://schemas.openxmlformats.org/officeDocument/2006/relationships" xmlns:p="http://schemas.openxmlformats.org/presentationml/2006/main">
   <p:cSld>
     <p:spTree>
@@ -5285,72 +3695,6 @@
           <a:chExt cx="0" cy="0"/>
         </a:xfrm>
       </p:grpSpPr>
-      <p:pic>
-        <p:nvPicPr>
-          <p:cNvPr id="2" name="Picture 1">
-            <a:extLst>
-              <a:ext uri="{FF2B5EF4-FFF2-40B4-BE49-F238E27FC236}">
-                <a16:creationId xmlns:a16="http://schemas.microsoft.com/office/drawing/2014/main" id="{4C5C42B7-20F9-CE09-360C-06C64DCF3DF1}"/>
-              </a:ext>
-              <a:ext uri="{C183D7F6-B498-43B3-948B-1728B52AA6E4}">
-                <adec:decorative xmlns:adec="http://schemas.microsoft.com/office/drawing/2017/decorative" val="1"/>
-              </a:ext>
-            </a:extLst>
-          </p:cNvPr>
-          <p:cNvPicPr>
-            <a:picLocks noChangeAspect="1"/>
-          </p:cNvPicPr>
-          <p:nvPr/>
-        </p:nvPicPr>
-        <p:blipFill>
-          <a:blip r:embed="rId2"/>
-          <a:stretch>
-            <a:fillRect/>
-          </a:stretch>
-        </p:blipFill>
-        <p:spPr>
-          <a:xfrm>
-            <a:off x="2404576" y="857250"/>
-            <a:ext cx="7385957" cy="5143500"/>
-          </a:xfrm>
-          <a:prstGeom prst="rect">
-            <a:avLst/>
-          </a:prstGeom>
-        </p:spPr>
-      </p:pic>
-      <p:pic>
-        <p:nvPicPr>
-          <p:cNvPr id="3" name="Picture 2">
-            <a:extLst>
-              <a:ext uri="{FF2B5EF4-FFF2-40B4-BE49-F238E27FC236}">
-                <a16:creationId xmlns:a16="http://schemas.microsoft.com/office/drawing/2014/main" id="{CCDD3661-34BC-7330-8529-45E02A2723C8}"/>
-              </a:ext>
-              <a:ext uri="{C183D7F6-B498-43B3-948B-1728B52AA6E4}">
-                <adec:decorative xmlns:adec="http://schemas.microsoft.com/office/drawing/2017/decorative" val="1"/>
-              </a:ext>
-            </a:extLst>
-          </p:cNvPr>
-          <p:cNvPicPr>
-            <a:picLocks noChangeAspect="1"/>
-          </p:cNvPicPr>
-          <p:nvPr/>
-        </p:nvPicPr>
-        <p:blipFill>
-          <a:blip r:embed="rId2"/>
-          <a:stretch>
-            <a:fillRect/>
-          </a:stretch>
-        </p:blipFill>
-        <p:spPr>
-          <a:xfrm>
-            <a:off x="2404576" y="1114622"/>
-            <a:ext cx="7385957" cy="5143500"/>
-          </a:xfrm>
-          <a:prstGeom prst="rect">
-            <a:avLst/>
-          </a:prstGeom>
-        </p:spPr>
-      </p:pic>
       <p:sp>
         <p:nvSpPr>
           <p:cNvPr id="5" name="TextBox 4">
@@ -5414,6 +3758,36 @@
           </a:p>
         </p:txBody>
       </p:sp>
+      <p:pic>
+        <p:nvPicPr>
+          <p:cNvPr id="8" name="Picture 7">
+            <a:extLst>
+              <a:ext uri="{FF2B5EF4-FFF2-40B4-BE49-F238E27FC236}">
+                <a16:creationId xmlns:a16="http://schemas.microsoft.com/office/drawing/2014/main" id="{1187ACE1-9A65-A0A5-B01F-DC10F2E89011}"/>
+              </a:ext>
+            </a:extLst>
+          </p:cNvPr>
+          <p:cNvPicPr>
+            <a:picLocks noChangeAspect="1"/>
+          </p:cNvPicPr>
+          <p:nvPr/>
+        </p:nvPicPr>
+        <p:blipFill>
+          <a:blip r:embed="rId2"/>
+          <a:stretch>
+            <a:fillRect/>
+          </a:stretch>
+        </p:blipFill>
+        <p:spPr>
+          <a:xfrm>
+            <a:off x="2466975" y="1636647"/>
+            <a:ext cx="7258050" cy="2371725"/>
+          </a:xfrm>
+          <a:prstGeom prst="rect">
+            <a:avLst/>
+          </a:prstGeom>
+        </p:spPr>
+      </p:pic>
     </p:spTree>
     <p:extLst>
       <p:ext uri="{BB962C8B-B14F-4D97-AF65-F5344CB8AC3E}">
@@ -5427,7 +3801,7 @@
 </p:sld>
 </file>
 
-<file path=ppt/slides/slide9.xml><?xml version="1.0" encoding="utf-8"?>
+<file path=ppt/slides/slide7.xml><?xml version="1.0" encoding="utf-8"?>
 <p:sld xmlns:a="http://schemas.openxmlformats.org/drawingml/2006/main" xmlns:r="http://schemas.openxmlformats.org/officeDocument/2006/relationships" xmlns:p="http://schemas.openxmlformats.org/presentationml/2006/main">
   <p:cSld name="Slide 8">
     <p:bg>
@@ -6233,6 +4607,274 @@
               <a:t>Anticipated outcomes for a proposal — results will depend on the methodology and evaluation once carried out.</a:t>
             </a:r>
             <a:endParaRPr lang="en-US" sz="1100" dirty="0"/>
+          </a:p>
+        </p:txBody>
+      </p:sp>
+    </p:spTree>
+  </p:cSld>
+  <p:clrMapOvr>
+    <a:masterClrMapping/>
+  </p:clrMapOvr>
+</p:sld>
+</file>
+
+<file path=ppt/slides/slide8.xml><?xml version="1.0" encoding="utf-8"?>
+<p:sld xmlns:a="http://schemas.openxmlformats.org/drawingml/2006/main" xmlns:r="http://schemas.openxmlformats.org/officeDocument/2006/relationships" xmlns:p="http://schemas.openxmlformats.org/presentationml/2006/main">
+  <p:cSld name="Slide 9">
+    <p:bg>
+      <p:bgPr>
+        <a:solidFill>
+          <a:srgbClr val="0D3B45"/>
+        </a:solidFill>
+        <a:effectLst/>
+      </p:bgPr>
+    </p:bg>
+    <p:spTree>
+      <p:nvGrpSpPr>
+        <p:cNvPr id="1" name=""/>
+        <p:cNvGrpSpPr/>
+        <p:nvPr/>
+      </p:nvGrpSpPr>
+      <p:grpSpPr>
+        <a:xfrm>
+          <a:off x="0" y="0"/>
+          <a:ext cx="0" cy="0"/>
+          <a:chOff x="0" y="0"/>
+          <a:chExt cx="0" cy="0"/>
+        </a:xfrm>
+      </p:grpSpPr>
+      <p:sp>
+        <p:nvSpPr>
+          <p:cNvPr id="2" name="Shape 0"/>
+          <p:cNvSpPr/>
+          <p:nvPr/>
+        </p:nvSpPr>
+        <p:spPr>
+          <a:xfrm>
+            <a:off x="-1554480" y="3657600"/>
+            <a:ext cx="4937760" cy="4937760"/>
+          </a:xfrm>
+          <a:prstGeom prst="ellipse">
+            <a:avLst/>
+          </a:prstGeom>
+          <a:solidFill>
+            <a:srgbClr val="0E7C86">
+              <a:alpha val="20000"/>
+            </a:srgbClr>
+          </a:solidFill>
+          <a:ln/>
+        </p:spPr>
+      </p:sp>
+      <p:sp>
+        <p:nvSpPr>
+          <p:cNvPr id="3" name="Shape 1"/>
+          <p:cNvSpPr/>
+          <p:nvPr/>
+        </p:nvSpPr>
+        <p:spPr>
+          <a:xfrm>
+            <a:off x="9692640" y="-1645920"/>
+            <a:ext cx="4572000" cy="4572000"/>
+          </a:xfrm>
+          <a:prstGeom prst="ellipse">
+            <a:avLst/>
+          </a:prstGeom>
+          <a:solidFill>
+            <a:srgbClr val="E8943A">
+              <a:alpha val="16000"/>
+            </a:srgbClr>
+          </a:solidFill>
+          <a:ln/>
+        </p:spPr>
+      </p:sp>
+      <p:sp>
+        <p:nvSpPr>
+          <p:cNvPr id="4" name="Shape 2"/>
+          <p:cNvSpPr/>
+          <p:nvPr/>
+        </p:nvSpPr>
+        <p:spPr>
+          <a:xfrm>
+            <a:off x="5394960" y="1051560"/>
+            <a:ext cx="1371600" cy="1371600"/>
+          </a:xfrm>
+          <a:prstGeom prst="ellipse">
+            <a:avLst/>
+          </a:prstGeom>
+          <a:solidFill>
+            <a:srgbClr val="E8943A"/>
+          </a:solidFill>
+          <a:ln/>
+          <a:effectLst>
+            <a:outerShdw blurRad="114300" dist="38100" dir="5400000" algn="bl" rotWithShape="0">
+              <a:srgbClr val="0A2E36">
+                <a:alpha val="16000"/>
+              </a:srgbClr>
+            </a:outerShdw>
+          </a:effectLst>
+        </p:spPr>
+      </p:sp>
+      <p:pic>
+        <p:nvPicPr>
+          <p:cNvPr id="5" name="Image 0" descr="preencoded.png"/>
+          <p:cNvPicPr>
+            <a:picLocks noChangeAspect="1"/>
+          </p:cNvPicPr>
+          <p:nvPr/>
+        </p:nvPicPr>
+        <p:blipFill>
+          <a:blip r:embed="rId3"/>
+          <a:stretch>
+            <a:fillRect/>
+          </a:stretch>
+        </p:blipFill>
+        <p:spPr>
+          <a:xfrm>
+            <a:off x="5733288" y="1389888"/>
+            <a:ext cx="694944" cy="694944"/>
+          </a:xfrm>
+          <a:prstGeom prst="rect">
+            <a:avLst/>
+          </a:prstGeom>
+        </p:spPr>
+      </p:pic>
+      <p:sp>
+        <p:nvSpPr>
+          <p:cNvPr id="6" name="Text 3"/>
+          <p:cNvSpPr/>
+          <p:nvPr/>
+        </p:nvSpPr>
+        <p:spPr>
+          <a:xfrm>
+            <a:off x="914400" y="2606040"/>
+            <a:ext cx="10332720" cy="914400"/>
+          </a:xfrm>
+          <a:prstGeom prst="rect">
+            <a:avLst/>
+          </a:prstGeom>
+          <a:noFill/>
+          <a:ln/>
+        </p:spPr>
+        <p:txBody>
+          <a:bodyPr wrap="square" lIns="0" tIns="0" rIns="0" bIns="0" rtlCol="0" anchor="ctr"/>
+          <a:lstStyle/>
+          <a:p>
+            <a:pPr marL="0" indent="0" algn="ctr">
+              <a:buNone/>
+            </a:pPr>
+            <a:r>
+              <a:rPr lang="en-US" sz="5600" b="1" dirty="0">
+                <a:solidFill>
+                  <a:srgbClr val="FFFFFF"/>
+                </a:solidFill>
+                <a:latin typeface="Cambria" pitchFamily="34" charset="0"/>
+                <a:ea typeface="Cambria" pitchFamily="34" charset="-122"/>
+                <a:cs typeface="Cambria" pitchFamily="34" charset="-120"/>
+              </a:rPr>
+              <a:t>Thank you</a:t>
+            </a:r>
+            <a:endParaRPr lang="en-US" sz="5600" dirty="0"/>
+          </a:p>
+        </p:txBody>
+      </p:sp>
+      <p:sp>
+        <p:nvSpPr>
+          <p:cNvPr id="7" name="Text 4"/>
+          <p:cNvSpPr/>
+          <p:nvPr/>
+        </p:nvSpPr>
+        <p:spPr>
+          <a:xfrm>
+            <a:off x="914400" y="3611880"/>
+            <a:ext cx="10332720" cy="548640"/>
+          </a:xfrm>
+          <a:prstGeom prst="rect">
+            <a:avLst/>
+          </a:prstGeom>
+          <a:noFill/>
+          <a:ln/>
+        </p:spPr>
+        <p:txBody>
+          <a:bodyPr wrap="square" lIns="0" tIns="0" rIns="0" bIns="0" rtlCol="0" anchor="ctr"/>
+          <a:lstStyle/>
+          <a:p>
+            <a:pPr marL="0" indent="0" algn="ctr">
+              <a:buNone/>
+            </a:pPr>
+            <a:r>
+              <a:rPr lang="en-US" sz="2200" dirty="0">
+                <a:solidFill>
+                  <a:srgbClr val="F6C57A"/>
+                </a:solidFill>
+                <a:latin typeface="Calibri" pitchFamily="34" charset="0"/>
+                <a:ea typeface="Calibri" pitchFamily="34" charset="-122"/>
+                <a:cs typeface="Calibri" pitchFamily="34" charset="-120"/>
+              </a:rPr>
+              <a:t>Questions &amp; Discussion</a:t>
+            </a:r>
+            <a:endParaRPr lang="en-US" sz="2200" dirty="0"/>
+          </a:p>
+        </p:txBody>
+      </p:sp>
+      <p:sp>
+        <p:nvSpPr>
+          <p:cNvPr id="8" name="Text 5"/>
+          <p:cNvSpPr/>
+          <p:nvPr/>
+        </p:nvSpPr>
+        <p:spPr>
+          <a:xfrm>
+            <a:off x="914400" y="4846320"/>
+            <a:ext cx="10332720" cy="914400"/>
+          </a:xfrm>
+          <a:prstGeom prst="rect">
+            <a:avLst/>
+          </a:prstGeom>
+          <a:noFill/>
+          <a:ln/>
+        </p:spPr>
+        <p:txBody>
+          <a:bodyPr wrap="square" lIns="0" tIns="0" rIns="0" bIns="0" rtlCol="0" anchor="t"/>
+          <a:lstStyle/>
+          <a:p>
+            <a:pPr marL="0" indent="0" algn="ctr">
+              <a:lnSpc>
+                <a:spcPts val="2600"/>
+              </a:lnSpc>
+              <a:buNone/>
+            </a:pPr>
+            <a:r>
+              <a:rPr lang="en-US" sz="1500" dirty="0">
+                <a:solidFill>
+                  <a:srgbClr val="EAF3F4"/>
+                </a:solidFill>
+                <a:latin typeface="Calibri" pitchFamily="34" charset="0"/>
+                <a:ea typeface="Calibri" pitchFamily="34" charset="-122"/>
+                <a:cs typeface="Calibri" pitchFamily="34" charset="-120"/>
+              </a:rPr>
+              <a:t>Jayrald B. Tajanlangit   •   Francis Marc Nikko Diwa   •   John Cale N. Nombrado</a:t>
+            </a:r>
+            <a:endParaRPr lang="en-US" sz="1500" dirty="0"/>
+          </a:p>
+          <a:p>
+            <a:pPr marL="0" indent="0" algn="ctr">
+              <a:lnSpc>
+                <a:spcPts val="2600"/>
+              </a:lnSpc>
+              <a:buNone/>
+            </a:pPr>
+            <a:r>
+              <a:rPr lang="en-US" sz="1400" dirty="0">
+                <a:solidFill>
+                  <a:srgbClr val="5A6B6E"/>
+                </a:solidFill>
+                <a:latin typeface="Calibri" pitchFamily="34" charset="0"/>
+                <a:ea typeface="Calibri" pitchFamily="34" charset="-122"/>
+                <a:cs typeface="Calibri" pitchFamily="34" charset="-120"/>
+              </a:rPr>
+              <a:t>Adviser:  Engr. Violdan Bayocot</a:t>
+            </a:r>
+            <a:endParaRPr lang="en-US" sz="1500" dirty="0"/>
           </a:p>
         </p:txBody>
       </p:sp>
